--- a/latest/macos-app-install/macos-app-install-slides.pptx
+++ b/latest/macos-app-install/macos-app-install-slides.pptx
@@ -5,13 +5,13 @@
     <p:sldMasterId xmlns:r="http://schemas.openxmlformats.org/officeDocument/2006/relationships" id="2147483648" r:id="rId1"/>
   </p:sldMasterIdLst>
   <p:sldIdLst>
-    <p:sldId id="256" r:id="R8d611fb840e049e5"/>
-    <p:sldId id="257" r:id="R74686d2efdbe4c51"/>
-    <p:sldId id="258" r:id="R68557771e54348d4"/>
-    <p:sldId id="259" r:id="R293c36502d124170"/>
-    <p:sldId id="260" r:id="Ra25b32c30af14f8d"/>
-    <p:sldId id="261" r:id="R2c47abb216cd4992"/>
-    <p:sldId id="262" r:id="Rfd73dc00899d4227"/>
+    <p:sldId id="256" r:id="R96ffd194586d4fb9"/>
+    <p:sldId id="257" r:id="Rbab24dc0122c4a2c"/>
+    <p:sldId id="258" r:id="R8abc5d51aeb74c33"/>
+    <p:sldId id="259" r:id="Rf1be90228ba045bb"/>
+    <p:sldId id="260" r:id="Rb1bdc34b25f8499b"/>
+    <p:sldId id="261" r:id="R1a58305e061c4838"/>
+    <p:sldId id="262" r:id="R674cb35febd14c21"/>
   </p:sldIdLst>
   <p:sldSz cx="12192000" cy="6858000" type="screen16x9"/>
   <p:notesSz cx="6858000" cy="9144000"/>
@@ -327,7 +327,7 @@
           <p:nvPr/>
         </p:nvPicPr>
         <p:blipFill>
-          <a:blip xmlns:r="http://schemas.openxmlformats.org/officeDocument/2006/relationships" xmlns:a="http://schemas.openxmlformats.org/drawingml/2006/main" r:embed="Rd4ce91706d61424c"/>
+          <a:blip xmlns:r="http://schemas.openxmlformats.org/officeDocument/2006/relationships" xmlns:a="http://schemas.openxmlformats.org/drawingml/2006/main" r:embed="R67a89efc3a944aee"/>
           <a:stretch xmlns:a="http://schemas.openxmlformats.org/drawingml/2006/main">
             <a:fillRect/>
           </a:stretch>
@@ -366,7 +366,7 @@
           <p:nvPr/>
         </p:nvPicPr>
         <p:blipFill>
-          <a:blip xmlns:r="http://schemas.openxmlformats.org/officeDocument/2006/relationships" xmlns:a="http://schemas.openxmlformats.org/drawingml/2006/main" r:embed="R765ac435abee47bb"/>
+          <a:blip xmlns:r="http://schemas.openxmlformats.org/officeDocument/2006/relationships" xmlns:a="http://schemas.openxmlformats.org/drawingml/2006/main" r:embed="R5aba7b04ffbf4eda"/>
           <a:stretch xmlns:a="http://schemas.openxmlformats.org/drawingml/2006/main">
             <a:fillRect/>
           </a:stretch>
@@ -405,7 +405,7 @@
           <p:nvPr/>
         </p:nvPicPr>
         <p:blipFill>
-          <a:blip xmlns:r="http://schemas.openxmlformats.org/officeDocument/2006/relationships" xmlns:a="http://schemas.openxmlformats.org/drawingml/2006/main" r:embed="R397cad108da74504"/>
+          <a:blip xmlns:r="http://schemas.openxmlformats.org/officeDocument/2006/relationships" xmlns:a="http://schemas.openxmlformats.org/drawingml/2006/main" r:embed="R70675975c73b4935"/>
           <a:stretch xmlns:a="http://schemas.openxmlformats.org/drawingml/2006/main">
             <a:fillRect/>
           </a:stretch>
@@ -444,7 +444,7 @@
           <p:nvPr/>
         </p:nvPicPr>
         <p:blipFill>
-          <a:blip xmlns:r="http://schemas.openxmlformats.org/officeDocument/2006/relationships" xmlns:a="http://schemas.openxmlformats.org/drawingml/2006/main" r:embed="R01c05f610b6645e2"/>
+          <a:blip xmlns:r="http://schemas.openxmlformats.org/officeDocument/2006/relationships" xmlns:a="http://schemas.openxmlformats.org/drawingml/2006/main" r:embed="R5c927a6e2089426f"/>
           <a:stretch xmlns:a="http://schemas.openxmlformats.org/drawingml/2006/main">
             <a:fillRect/>
           </a:stretch>
@@ -483,7 +483,7 @@
           <p:nvPr/>
         </p:nvPicPr>
         <p:blipFill>
-          <a:blip xmlns:r="http://schemas.openxmlformats.org/officeDocument/2006/relationships" xmlns:a="http://schemas.openxmlformats.org/drawingml/2006/main" r:embed="R86c91dd1de3e4ad8"/>
+          <a:blip xmlns:r="http://schemas.openxmlformats.org/officeDocument/2006/relationships" xmlns:a="http://schemas.openxmlformats.org/drawingml/2006/main" r:embed="Rda9adeb847ca4480"/>
           <a:stretch xmlns:a="http://schemas.openxmlformats.org/drawingml/2006/main">
             <a:fillRect/>
           </a:stretch>
@@ -522,7 +522,7 @@
           <p:nvPr/>
         </p:nvPicPr>
         <p:blipFill>
-          <a:blip xmlns:r="http://schemas.openxmlformats.org/officeDocument/2006/relationships" xmlns:a="http://schemas.openxmlformats.org/drawingml/2006/main" r:embed="R266a166ef3e1467f"/>
+          <a:blip xmlns:r="http://schemas.openxmlformats.org/officeDocument/2006/relationships" xmlns:a="http://schemas.openxmlformats.org/drawingml/2006/main" r:embed="R1ffee1ff17714fef"/>
           <a:stretch xmlns:a="http://schemas.openxmlformats.org/drawingml/2006/main">
             <a:fillRect/>
           </a:stretch>
@@ -561,7 +561,7 @@
           <p:nvPr/>
         </p:nvPicPr>
         <p:blipFill>
-          <a:blip xmlns:r="http://schemas.openxmlformats.org/officeDocument/2006/relationships" xmlns:a="http://schemas.openxmlformats.org/drawingml/2006/main" r:embed="R07063bf8bc8d4a79"/>
+          <a:blip xmlns:r="http://schemas.openxmlformats.org/officeDocument/2006/relationships" xmlns:a="http://schemas.openxmlformats.org/drawingml/2006/main" r:embed="Rbb8f2dec7fec497f"/>
           <a:stretch xmlns:a="http://schemas.openxmlformats.org/drawingml/2006/main">
             <a:fillRect/>
           </a:stretch>

--- a/latest/macos-app-install/macos-app-install-slides.pptx
+++ b/latest/macos-app-install/macos-app-install-slides.pptx
@@ -5,13 +5,13 @@
     <p:sldMasterId xmlns:r="http://schemas.openxmlformats.org/officeDocument/2006/relationships" id="2147483648" r:id="rId1"/>
   </p:sldMasterIdLst>
   <p:sldIdLst>
-    <p:sldId id="256" r:id="R96ffd194586d4fb9"/>
-    <p:sldId id="257" r:id="Rbab24dc0122c4a2c"/>
-    <p:sldId id="258" r:id="R8abc5d51aeb74c33"/>
-    <p:sldId id="259" r:id="Rf1be90228ba045bb"/>
-    <p:sldId id="260" r:id="Rb1bdc34b25f8499b"/>
-    <p:sldId id="261" r:id="R1a58305e061c4838"/>
-    <p:sldId id="262" r:id="R674cb35febd14c21"/>
+    <p:sldId id="256" r:id="R362d945d8c304965"/>
+    <p:sldId id="257" r:id="Raf0925b5b4114bc8"/>
+    <p:sldId id="258" r:id="Rf941da98383a426a"/>
+    <p:sldId id="259" r:id="Racf2455c10ee41cc"/>
+    <p:sldId id="260" r:id="R3b4311ec7e7c4ece"/>
+    <p:sldId id="261" r:id="Rd01600e006f84c26"/>
+    <p:sldId id="262" r:id="R108fc02600c64604"/>
   </p:sldIdLst>
   <p:sldSz cx="12192000" cy="6858000" type="screen16x9"/>
   <p:notesSz cx="6858000" cy="9144000"/>
@@ -327,7 +327,7 @@
           <p:nvPr/>
         </p:nvPicPr>
         <p:blipFill>
-          <a:blip xmlns:r="http://schemas.openxmlformats.org/officeDocument/2006/relationships" xmlns:a="http://schemas.openxmlformats.org/drawingml/2006/main" r:embed="R67a89efc3a944aee"/>
+          <a:blip xmlns:r="http://schemas.openxmlformats.org/officeDocument/2006/relationships" xmlns:a="http://schemas.openxmlformats.org/drawingml/2006/main" r:embed="R49d3fb7a960747aa"/>
           <a:stretch xmlns:a="http://schemas.openxmlformats.org/drawingml/2006/main">
             <a:fillRect/>
           </a:stretch>
@@ -366,7 +366,7 @@
           <p:nvPr/>
         </p:nvPicPr>
         <p:blipFill>
-          <a:blip xmlns:r="http://schemas.openxmlformats.org/officeDocument/2006/relationships" xmlns:a="http://schemas.openxmlformats.org/drawingml/2006/main" r:embed="R5aba7b04ffbf4eda"/>
+          <a:blip xmlns:r="http://schemas.openxmlformats.org/officeDocument/2006/relationships" xmlns:a="http://schemas.openxmlformats.org/drawingml/2006/main" r:embed="R55bf11e429bc4c40"/>
           <a:stretch xmlns:a="http://schemas.openxmlformats.org/drawingml/2006/main">
             <a:fillRect/>
           </a:stretch>
@@ -405,7 +405,7 @@
           <p:nvPr/>
         </p:nvPicPr>
         <p:blipFill>
-          <a:blip xmlns:r="http://schemas.openxmlformats.org/officeDocument/2006/relationships" xmlns:a="http://schemas.openxmlformats.org/drawingml/2006/main" r:embed="R70675975c73b4935"/>
+          <a:blip xmlns:r="http://schemas.openxmlformats.org/officeDocument/2006/relationships" xmlns:a="http://schemas.openxmlformats.org/drawingml/2006/main" r:embed="R1b1e2335eab344f3"/>
           <a:stretch xmlns:a="http://schemas.openxmlformats.org/drawingml/2006/main">
             <a:fillRect/>
           </a:stretch>
@@ -444,7 +444,7 @@
           <p:nvPr/>
         </p:nvPicPr>
         <p:blipFill>
-          <a:blip xmlns:r="http://schemas.openxmlformats.org/officeDocument/2006/relationships" xmlns:a="http://schemas.openxmlformats.org/drawingml/2006/main" r:embed="R5c927a6e2089426f"/>
+          <a:blip xmlns:r="http://schemas.openxmlformats.org/officeDocument/2006/relationships" xmlns:a="http://schemas.openxmlformats.org/drawingml/2006/main" r:embed="R9fa6478e4df54bca"/>
           <a:stretch xmlns:a="http://schemas.openxmlformats.org/drawingml/2006/main">
             <a:fillRect/>
           </a:stretch>
@@ -483,7 +483,7 @@
           <p:nvPr/>
         </p:nvPicPr>
         <p:blipFill>
-          <a:blip xmlns:r="http://schemas.openxmlformats.org/officeDocument/2006/relationships" xmlns:a="http://schemas.openxmlformats.org/drawingml/2006/main" r:embed="Rda9adeb847ca4480"/>
+          <a:blip xmlns:r="http://schemas.openxmlformats.org/officeDocument/2006/relationships" xmlns:a="http://schemas.openxmlformats.org/drawingml/2006/main" r:embed="R40370a09ce524fd9"/>
           <a:stretch xmlns:a="http://schemas.openxmlformats.org/drawingml/2006/main">
             <a:fillRect/>
           </a:stretch>
@@ -522,7 +522,7 @@
           <p:nvPr/>
         </p:nvPicPr>
         <p:blipFill>
-          <a:blip xmlns:r="http://schemas.openxmlformats.org/officeDocument/2006/relationships" xmlns:a="http://schemas.openxmlformats.org/drawingml/2006/main" r:embed="R1ffee1ff17714fef"/>
+          <a:blip xmlns:r="http://schemas.openxmlformats.org/officeDocument/2006/relationships" xmlns:a="http://schemas.openxmlformats.org/drawingml/2006/main" r:embed="R436f171a133d49ec"/>
           <a:stretch xmlns:a="http://schemas.openxmlformats.org/drawingml/2006/main">
             <a:fillRect/>
           </a:stretch>
@@ -561,7 +561,7 @@
           <p:nvPr/>
         </p:nvPicPr>
         <p:blipFill>
-          <a:blip xmlns:r="http://schemas.openxmlformats.org/officeDocument/2006/relationships" xmlns:a="http://schemas.openxmlformats.org/drawingml/2006/main" r:embed="Rbb8f2dec7fec497f"/>
+          <a:blip xmlns:r="http://schemas.openxmlformats.org/officeDocument/2006/relationships" xmlns:a="http://schemas.openxmlformats.org/drawingml/2006/main" r:embed="R418f44c9c47f488f"/>
           <a:stretch xmlns:a="http://schemas.openxmlformats.org/drawingml/2006/main">
             <a:fillRect/>
           </a:stretch>

--- a/latest/macos-app-install/macos-app-install-slides.pptx
+++ b/latest/macos-app-install/macos-app-install-slides.pptx
@@ -5,13 +5,13 @@
     <p:sldMasterId xmlns:r="http://schemas.openxmlformats.org/officeDocument/2006/relationships" id="2147483648" r:id="rId1"/>
   </p:sldMasterIdLst>
   <p:sldIdLst>
-    <p:sldId id="256" r:id="R362d945d8c304965"/>
-    <p:sldId id="257" r:id="Raf0925b5b4114bc8"/>
-    <p:sldId id="258" r:id="Rf941da98383a426a"/>
-    <p:sldId id="259" r:id="Racf2455c10ee41cc"/>
-    <p:sldId id="260" r:id="R3b4311ec7e7c4ece"/>
-    <p:sldId id="261" r:id="Rd01600e006f84c26"/>
-    <p:sldId id="262" r:id="R108fc02600c64604"/>
+    <p:sldId id="256" r:id="R96ffd194586d4fb9"/>
+    <p:sldId id="257" r:id="Rbab24dc0122c4a2c"/>
+    <p:sldId id="258" r:id="R8abc5d51aeb74c33"/>
+    <p:sldId id="259" r:id="Rf1be90228ba045bb"/>
+    <p:sldId id="260" r:id="Rb1bdc34b25f8499b"/>
+    <p:sldId id="261" r:id="R1a58305e061c4838"/>
+    <p:sldId id="262" r:id="R674cb35febd14c21"/>
   </p:sldIdLst>
   <p:sldSz cx="12192000" cy="6858000" type="screen16x9"/>
   <p:notesSz cx="6858000" cy="9144000"/>
@@ -327,7 +327,7 @@
           <p:nvPr/>
         </p:nvPicPr>
         <p:blipFill>
-          <a:blip xmlns:r="http://schemas.openxmlformats.org/officeDocument/2006/relationships" xmlns:a="http://schemas.openxmlformats.org/drawingml/2006/main" r:embed="R49d3fb7a960747aa"/>
+          <a:blip xmlns:r="http://schemas.openxmlformats.org/officeDocument/2006/relationships" xmlns:a="http://schemas.openxmlformats.org/drawingml/2006/main" r:embed="R67a89efc3a944aee"/>
           <a:stretch xmlns:a="http://schemas.openxmlformats.org/drawingml/2006/main">
             <a:fillRect/>
           </a:stretch>
@@ -366,7 +366,7 @@
           <p:nvPr/>
         </p:nvPicPr>
         <p:blipFill>
-          <a:blip xmlns:r="http://schemas.openxmlformats.org/officeDocument/2006/relationships" xmlns:a="http://schemas.openxmlformats.org/drawingml/2006/main" r:embed="R55bf11e429bc4c40"/>
+          <a:blip xmlns:r="http://schemas.openxmlformats.org/officeDocument/2006/relationships" xmlns:a="http://schemas.openxmlformats.org/drawingml/2006/main" r:embed="R5aba7b04ffbf4eda"/>
           <a:stretch xmlns:a="http://schemas.openxmlformats.org/drawingml/2006/main">
             <a:fillRect/>
           </a:stretch>
@@ -405,7 +405,7 @@
           <p:nvPr/>
         </p:nvPicPr>
         <p:blipFill>
-          <a:blip xmlns:r="http://schemas.openxmlformats.org/officeDocument/2006/relationships" xmlns:a="http://schemas.openxmlformats.org/drawingml/2006/main" r:embed="R1b1e2335eab344f3"/>
+          <a:blip xmlns:r="http://schemas.openxmlformats.org/officeDocument/2006/relationships" xmlns:a="http://schemas.openxmlformats.org/drawingml/2006/main" r:embed="R70675975c73b4935"/>
           <a:stretch xmlns:a="http://schemas.openxmlformats.org/drawingml/2006/main">
             <a:fillRect/>
           </a:stretch>
@@ -444,7 +444,7 @@
           <p:nvPr/>
         </p:nvPicPr>
         <p:blipFill>
-          <a:blip xmlns:r="http://schemas.openxmlformats.org/officeDocument/2006/relationships" xmlns:a="http://schemas.openxmlformats.org/drawingml/2006/main" r:embed="R9fa6478e4df54bca"/>
+          <a:blip xmlns:r="http://schemas.openxmlformats.org/officeDocument/2006/relationships" xmlns:a="http://schemas.openxmlformats.org/drawingml/2006/main" r:embed="R5c927a6e2089426f"/>
           <a:stretch xmlns:a="http://schemas.openxmlformats.org/drawingml/2006/main">
             <a:fillRect/>
           </a:stretch>
@@ -483,7 +483,7 @@
           <p:nvPr/>
         </p:nvPicPr>
         <p:blipFill>
-          <a:blip xmlns:r="http://schemas.openxmlformats.org/officeDocument/2006/relationships" xmlns:a="http://schemas.openxmlformats.org/drawingml/2006/main" r:embed="R40370a09ce524fd9"/>
+          <a:blip xmlns:r="http://schemas.openxmlformats.org/officeDocument/2006/relationships" xmlns:a="http://schemas.openxmlformats.org/drawingml/2006/main" r:embed="Rda9adeb847ca4480"/>
           <a:stretch xmlns:a="http://schemas.openxmlformats.org/drawingml/2006/main">
             <a:fillRect/>
           </a:stretch>
@@ -522,7 +522,7 @@
           <p:nvPr/>
         </p:nvPicPr>
         <p:blipFill>
-          <a:blip xmlns:r="http://schemas.openxmlformats.org/officeDocument/2006/relationships" xmlns:a="http://schemas.openxmlformats.org/drawingml/2006/main" r:embed="R436f171a133d49ec"/>
+          <a:blip xmlns:r="http://schemas.openxmlformats.org/officeDocument/2006/relationships" xmlns:a="http://schemas.openxmlformats.org/drawingml/2006/main" r:embed="R1ffee1ff17714fef"/>
           <a:stretch xmlns:a="http://schemas.openxmlformats.org/drawingml/2006/main">
             <a:fillRect/>
           </a:stretch>
@@ -561,7 +561,7 @@
           <p:nvPr/>
         </p:nvPicPr>
         <p:blipFill>
-          <a:blip xmlns:r="http://schemas.openxmlformats.org/officeDocument/2006/relationships" xmlns:a="http://schemas.openxmlformats.org/drawingml/2006/main" r:embed="R418f44c9c47f488f"/>
+          <a:blip xmlns:r="http://schemas.openxmlformats.org/officeDocument/2006/relationships" xmlns:a="http://schemas.openxmlformats.org/drawingml/2006/main" r:embed="Rbb8f2dec7fec497f"/>
           <a:stretch xmlns:a="http://schemas.openxmlformats.org/drawingml/2006/main">
             <a:fillRect/>
           </a:stretch>

--- a/latest/macos-app-install/macos-app-install-slides.pptx
+++ b/latest/macos-app-install/macos-app-install-slides.pptx
@@ -5,13 +5,13 @@
     <p:sldMasterId xmlns:r="http://schemas.openxmlformats.org/officeDocument/2006/relationships" id="2147483648" r:id="rId1"/>
   </p:sldMasterIdLst>
   <p:sldIdLst>
-    <p:sldId id="256" r:id="R96ffd194586d4fb9"/>
-    <p:sldId id="257" r:id="Rbab24dc0122c4a2c"/>
-    <p:sldId id="258" r:id="R8abc5d51aeb74c33"/>
-    <p:sldId id="259" r:id="Rf1be90228ba045bb"/>
-    <p:sldId id="260" r:id="Rb1bdc34b25f8499b"/>
-    <p:sldId id="261" r:id="R1a58305e061c4838"/>
-    <p:sldId id="262" r:id="R674cb35febd14c21"/>
+    <p:sldId id="256" r:id="R494647f4c11c4f84"/>
+    <p:sldId id="257" r:id="R35c4ebef4eda4fe9"/>
+    <p:sldId id="258" r:id="R368b13557af940f3"/>
+    <p:sldId id="259" r:id="R7926ff723c854607"/>
+    <p:sldId id="260" r:id="R69d3ddba35d6477b"/>
+    <p:sldId id="261" r:id="R03080afee8b34ff6"/>
+    <p:sldId id="262" r:id="R08770733c1774471"/>
   </p:sldIdLst>
   <p:sldSz cx="12192000" cy="6858000" type="screen16x9"/>
   <p:notesSz cx="6858000" cy="9144000"/>
@@ -327,7 +327,7 @@
           <p:nvPr/>
         </p:nvPicPr>
         <p:blipFill>
-          <a:blip xmlns:r="http://schemas.openxmlformats.org/officeDocument/2006/relationships" xmlns:a="http://schemas.openxmlformats.org/drawingml/2006/main" r:embed="R67a89efc3a944aee"/>
+          <a:blip xmlns:r="http://schemas.openxmlformats.org/officeDocument/2006/relationships" xmlns:a="http://schemas.openxmlformats.org/drawingml/2006/main" r:embed="Rb8d598d0100e4b68"/>
           <a:stretch xmlns:a="http://schemas.openxmlformats.org/drawingml/2006/main">
             <a:fillRect/>
           </a:stretch>
@@ -366,7 +366,7 @@
           <p:nvPr/>
         </p:nvPicPr>
         <p:blipFill>
-          <a:blip xmlns:r="http://schemas.openxmlformats.org/officeDocument/2006/relationships" xmlns:a="http://schemas.openxmlformats.org/drawingml/2006/main" r:embed="R5aba7b04ffbf4eda"/>
+          <a:blip xmlns:r="http://schemas.openxmlformats.org/officeDocument/2006/relationships" xmlns:a="http://schemas.openxmlformats.org/drawingml/2006/main" r:embed="R6507ce6096b44aa1"/>
           <a:stretch xmlns:a="http://schemas.openxmlformats.org/drawingml/2006/main">
             <a:fillRect/>
           </a:stretch>
@@ -405,7 +405,7 @@
           <p:nvPr/>
         </p:nvPicPr>
         <p:blipFill>
-          <a:blip xmlns:r="http://schemas.openxmlformats.org/officeDocument/2006/relationships" xmlns:a="http://schemas.openxmlformats.org/drawingml/2006/main" r:embed="R70675975c73b4935"/>
+          <a:blip xmlns:r="http://schemas.openxmlformats.org/officeDocument/2006/relationships" xmlns:a="http://schemas.openxmlformats.org/drawingml/2006/main" r:embed="Rb346c7cac7ec4a09"/>
           <a:stretch xmlns:a="http://schemas.openxmlformats.org/drawingml/2006/main">
             <a:fillRect/>
           </a:stretch>
@@ -444,7 +444,7 @@
           <p:nvPr/>
         </p:nvPicPr>
         <p:blipFill>
-          <a:blip xmlns:r="http://schemas.openxmlformats.org/officeDocument/2006/relationships" xmlns:a="http://schemas.openxmlformats.org/drawingml/2006/main" r:embed="R5c927a6e2089426f"/>
+          <a:blip xmlns:r="http://schemas.openxmlformats.org/officeDocument/2006/relationships" xmlns:a="http://schemas.openxmlformats.org/drawingml/2006/main" r:embed="R0b41388258654f8b"/>
           <a:stretch xmlns:a="http://schemas.openxmlformats.org/drawingml/2006/main">
             <a:fillRect/>
           </a:stretch>
@@ -483,7 +483,7 @@
           <p:nvPr/>
         </p:nvPicPr>
         <p:blipFill>
-          <a:blip xmlns:r="http://schemas.openxmlformats.org/officeDocument/2006/relationships" xmlns:a="http://schemas.openxmlformats.org/drawingml/2006/main" r:embed="Rda9adeb847ca4480"/>
+          <a:blip xmlns:r="http://schemas.openxmlformats.org/officeDocument/2006/relationships" xmlns:a="http://schemas.openxmlformats.org/drawingml/2006/main" r:embed="Ra4d8cfe8497844a6"/>
           <a:stretch xmlns:a="http://schemas.openxmlformats.org/drawingml/2006/main">
             <a:fillRect/>
           </a:stretch>
@@ -522,7 +522,7 @@
           <p:nvPr/>
         </p:nvPicPr>
         <p:blipFill>
-          <a:blip xmlns:r="http://schemas.openxmlformats.org/officeDocument/2006/relationships" xmlns:a="http://schemas.openxmlformats.org/drawingml/2006/main" r:embed="R1ffee1ff17714fef"/>
+          <a:blip xmlns:r="http://schemas.openxmlformats.org/officeDocument/2006/relationships" xmlns:a="http://schemas.openxmlformats.org/drawingml/2006/main" r:embed="R3b7e7010c0ad497e"/>
           <a:stretch xmlns:a="http://schemas.openxmlformats.org/drawingml/2006/main">
             <a:fillRect/>
           </a:stretch>
@@ -561,7 +561,7 @@
           <p:nvPr/>
         </p:nvPicPr>
         <p:blipFill>
-          <a:blip xmlns:r="http://schemas.openxmlformats.org/officeDocument/2006/relationships" xmlns:a="http://schemas.openxmlformats.org/drawingml/2006/main" r:embed="Rbb8f2dec7fec497f"/>
+          <a:blip xmlns:r="http://schemas.openxmlformats.org/officeDocument/2006/relationships" xmlns:a="http://schemas.openxmlformats.org/drawingml/2006/main" r:embed="Rbe477047d6504bd2"/>
           <a:stretch xmlns:a="http://schemas.openxmlformats.org/drawingml/2006/main">
             <a:fillRect/>
           </a:stretch>

--- a/latest/macos-app-install/macos-app-install-slides.pptx
+++ b/latest/macos-app-install/macos-app-install-slides.pptx
@@ -5,13 +5,14 @@
     <p:sldMasterId xmlns:r="http://schemas.openxmlformats.org/officeDocument/2006/relationships" id="2147483648" r:id="rId1"/>
   </p:sldMasterIdLst>
   <p:sldIdLst>
-    <p:sldId id="256" r:id="R494647f4c11c4f84"/>
-    <p:sldId id="257" r:id="R35c4ebef4eda4fe9"/>
-    <p:sldId id="258" r:id="R368b13557af940f3"/>
-    <p:sldId id="259" r:id="R7926ff723c854607"/>
-    <p:sldId id="260" r:id="R69d3ddba35d6477b"/>
-    <p:sldId id="261" r:id="R03080afee8b34ff6"/>
-    <p:sldId id="262" r:id="R08770733c1774471"/>
+    <p:sldId id="256" r:id="Re8c73646aced479c"/>
+    <p:sldId id="257" r:id="R812ee914148a4d99"/>
+    <p:sldId id="258" r:id="Rac2bea7562ea4563"/>
+    <p:sldId id="259" r:id="Rdc6f45aab4e24ff2"/>
+    <p:sldId id="260" r:id="R8e5e383020aa454b"/>
+    <p:sldId id="261" r:id="R7d963b62c4fd477b"/>
+    <p:sldId id="262" r:id="R643b4cbff7ad483d"/>
+    <p:sldId id="263" r:id="Rda048a72370646d8"/>
   </p:sldIdLst>
   <p:sldSz cx="12192000" cy="6858000" type="screen16x9"/>
   <p:notesSz cx="6858000" cy="9144000"/>
@@ -327,7 +328,7 @@
           <p:nvPr/>
         </p:nvPicPr>
         <p:blipFill>
-          <a:blip xmlns:r="http://schemas.openxmlformats.org/officeDocument/2006/relationships" xmlns:a="http://schemas.openxmlformats.org/drawingml/2006/main" r:embed="Rb8d598d0100e4b68"/>
+          <a:blip xmlns:r="http://schemas.openxmlformats.org/officeDocument/2006/relationships" xmlns:a="http://schemas.openxmlformats.org/drawingml/2006/main" r:embed="R91b0dfedb09544ad"/>
           <a:stretch xmlns:a="http://schemas.openxmlformats.org/drawingml/2006/main">
             <a:fillRect/>
           </a:stretch>
@@ -366,7 +367,7 @@
           <p:nvPr/>
         </p:nvPicPr>
         <p:blipFill>
-          <a:blip xmlns:r="http://schemas.openxmlformats.org/officeDocument/2006/relationships" xmlns:a="http://schemas.openxmlformats.org/drawingml/2006/main" r:embed="R6507ce6096b44aa1"/>
+          <a:blip xmlns:r="http://schemas.openxmlformats.org/officeDocument/2006/relationships" xmlns:a="http://schemas.openxmlformats.org/drawingml/2006/main" r:embed="R1081009a3c034cdf"/>
           <a:stretch xmlns:a="http://schemas.openxmlformats.org/drawingml/2006/main">
             <a:fillRect/>
           </a:stretch>
@@ -405,7 +406,7 @@
           <p:nvPr/>
         </p:nvPicPr>
         <p:blipFill>
-          <a:blip xmlns:r="http://schemas.openxmlformats.org/officeDocument/2006/relationships" xmlns:a="http://schemas.openxmlformats.org/drawingml/2006/main" r:embed="Rb346c7cac7ec4a09"/>
+          <a:blip xmlns:r="http://schemas.openxmlformats.org/officeDocument/2006/relationships" xmlns:a="http://schemas.openxmlformats.org/drawingml/2006/main" r:embed="R6de4868162c248e3"/>
           <a:stretch xmlns:a="http://schemas.openxmlformats.org/drawingml/2006/main">
             <a:fillRect/>
           </a:stretch>
@@ -444,7 +445,7 @@
           <p:nvPr/>
         </p:nvPicPr>
         <p:blipFill>
-          <a:blip xmlns:r="http://schemas.openxmlformats.org/officeDocument/2006/relationships" xmlns:a="http://schemas.openxmlformats.org/drawingml/2006/main" r:embed="R0b41388258654f8b"/>
+          <a:blip xmlns:r="http://schemas.openxmlformats.org/officeDocument/2006/relationships" xmlns:a="http://schemas.openxmlformats.org/drawingml/2006/main" r:embed="R56c0d4cede96449d"/>
           <a:stretch xmlns:a="http://schemas.openxmlformats.org/drawingml/2006/main">
             <a:fillRect/>
           </a:stretch>
@@ -483,7 +484,7 @@
           <p:nvPr/>
         </p:nvPicPr>
         <p:blipFill>
-          <a:blip xmlns:r="http://schemas.openxmlformats.org/officeDocument/2006/relationships" xmlns:a="http://schemas.openxmlformats.org/drawingml/2006/main" r:embed="Ra4d8cfe8497844a6"/>
+          <a:blip xmlns:r="http://schemas.openxmlformats.org/officeDocument/2006/relationships" xmlns:a="http://schemas.openxmlformats.org/drawingml/2006/main" r:embed="R5b1fc558d9164076"/>
           <a:stretch xmlns:a="http://schemas.openxmlformats.org/drawingml/2006/main">
             <a:fillRect/>
           </a:stretch>
@@ -522,7 +523,7 @@
           <p:nvPr/>
         </p:nvPicPr>
         <p:blipFill>
-          <a:blip xmlns:r="http://schemas.openxmlformats.org/officeDocument/2006/relationships" xmlns:a="http://schemas.openxmlformats.org/drawingml/2006/main" r:embed="R3b7e7010c0ad497e"/>
+          <a:blip xmlns:r="http://schemas.openxmlformats.org/officeDocument/2006/relationships" xmlns:a="http://schemas.openxmlformats.org/drawingml/2006/main" r:embed="Rc4dc05b6395542fb"/>
           <a:stretch xmlns:a="http://schemas.openxmlformats.org/drawingml/2006/main">
             <a:fillRect/>
           </a:stretch>
@@ -561,7 +562,46 @@
           <p:nvPr/>
         </p:nvPicPr>
         <p:blipFill>
-          <a:blip xmlns:r="http://schemas.openxmlformats.org/officeDocument/2006/relationships" xmlns:a="http://schemas.openxmlformats.org/drawingml/2006/main" r:embed="Rbe477047d6504bd2"/>
+          <a:blip xmlns:r="http://schemas.openxmlformats.org/officeDocument/2006/relationships" xmlns:a="http://schemas.openxmlformats.org/drawingml/2006/main" r:embed="R351e05ac09e14b04"/>
+          <a:stretch xmlns:a="http://schemas.openxmlformats.org/drawingml/2006/main">
+            <a:fillRect/>
+          </a:stretch>
+        </p:blipFill>
+        <p:spPr>
+          <a:xfrm xmlns:a="http://schemas.openxmlformats.org/drawingml/2006/main">
+            <a:off x="0" y="0"/>
+            <a:ext cx="12192000" cy="6858000"/>
+          </a:xfrm>
+          <a:prstGeom xmlns:a="http://schemas.openxmlformats.org/drawingml/2006/main" prst="rect">
+            <a:avLst/>
+          </a:prstGeom>
+        </p:spPr>
+      </p:pic>
+    </p:spTree>
+  </p:cSld>
+</p:sld>
+</file>
+
+<file path=ppt/slides/slide8.xml><?xml version="1.0" encoding="utf-8"?>
+<p:sld xmlns:p="http://schemas.openxmlformats.org/presentationml/2006/main">
+  <p:cSld name="Slide 8">
+    <p:spTree>
+      <p:nvGrpSpPr>
+        <p:cNvPr id="1" name=""/>
+        <p:cNvGrpSpPr/>
+        <p:nvPr/>
+      </p:nvGrpSpPr>
+      <p:grpSpPr/>
+      <p:pic>
+        <p:nvPicPr>
+          <p:cNvPr id="100007" name="Rendered page 8" descr="Rendered static page 8"/>
+          <p:cNvPicPr>
+            <a:picLocks xmlns:a="http://schemas.openxmlformats.org/drawingml/2006/main" noChangeAspect="1"/>
+          </p:cNvPicPr>
+          <p:nvPr/>
+        </p:nvPicPr>
+        <p:blipFill>
+          <a:blip xmlns:r="http://schemas.openxmlformats.org/officeDocument/2006/relationships" xmlns:a="http://schemas.openxmlformats.org/drawingml/2006/main" r:embed="Re7412dd07af2485e"/>
           <a:stretch xmlns:a="http://schemas.openxmlformats.org/drawingml/2006/main">
             <a:fillRect/>
           </a:stretch>
@@ -625,12 +665,12 @@
     <a:fontScheme name="Office">
       <a:majorFont>
         <a:latin typeface="Calibri Light"/>
-        <a:ea typeface=""/>
+        <a:ea typeface="等线"/>
         <a:cs typeface=""/>
       </a:majorFont>
       <a:minorFont>
         <a:latin typeface="Calibri"/>
-        <a:ea typeface=""/>
+        <a:ea typeface="等线"/>
         <a:cs typeface=""/>
       </a:minorFont>
     </a:fontScheme>

--- a/latest/macos-app-install/macos-app-install-slides.pptx
+++ b/latest/macos-app-install/macos-app-install-slides.pptx
@@ -5,14 +5,14 @@
     <p:sldMasterId xmlns:r="http://schemas.openxmlformats.org/officeDocument/2006/relationships" id="2147483648" r:id="rId1"/>
   </p:sldMasterIdLst>
   <p:sldIdLst>
-    <p:sldId id="256" r:id="Re8c73646aced479c"/>
-    <p:sldId id="257" r:id="R812ee914148a4d99"/>
-    <p:sldId id="258" r:id="Rac2bea7562ea4563"/>
-    <p:sldId id="259" r:id="Rdc6f45aab4e24ff2"/>
-    <p:sldId id="260" r:id="R8e5e383020aa454b"/>
-    <p:sldId id="261" r:id="R7d963b62c4fd477b"/>
-    <p:sldId id="262" r:id="R643b4cbff7ad483d"/>
-    <p:sldId id="263" r:id="Rda048a72370646d8"/>
+    <p:sldId id="256" r:id="Rd3e5b2fdb472422d"/>
+    <p:sldId id="257" r:id="Rff33c7425b5a425b"/>
+    <p:sldId id="258" r:id="Rf1bd0c89162141f9"/>
+    <p:sldId id="259" r:id="Rcff129f86a28425f"/>
+    <p:sldId id="260" r:id="R500b48141a5c463d"/>
+    <p:sldId id="261" r:id="Ra72dd777175a4dda"/>
+    <p:sldId id="262" r:id="R6ad79157f1084357"/>
+    <p:sldId id="263" r:id="R7485ff926dc74233"/>
   </p:sldIdLst>
   <p:sldSz cx="12192000" cy="6858000" type="screen16x9"/>
   <p:notesSz cx="6858000" cy="9144000"/>
@@ -328,7 +328,7 @@
           <p:nvPr/>
         </p:nvPicPr>
         <p:blipFill>
-          <a:blip xmlns:r="http://schemas.openxmlformats.org/officeDocument/2006/relationships" xmlns:a="http://schemas.openxmlformats.org/drawingml/2006/main" r:embed="R91b0dfedb09544ad"/>
+          <a:blip xmlns:r="http://schemas.openxmlformats.org/officeDocument/2006/relationships" xmlns:a="http://schemas.openxmlformats.org/drawingml/2006/main" r:embed="R065c566ee9bf4e88"/>
           <a:stretch xmlns:a="http://schemas.openxmlformats.org/drawingml/2006/main">
             <a:fillRect/>
           </a:stretch>
@@ -367,7 +367,7 @@
           <p:nvPr/>
         </p:nvPicPr>
         <p:blipFill>
-          <a:blip xmlns:r="http://schemas.openxmlformats.org/officeDocument/2006/relationships" xmlns:a="http://schemas.openxmlformats.org/drawingml/2006/main" r:embed="R1081009a3c034cdf"/>
+          <a:blip xmlns:r="http://schemas.openxmlformats.org/officeDocument/2006/relationships" xmlns:a="http://schemas.openxmlformats.org/drawingml/2006/main" r:embed="R4ad27e8053da4d67"/>
           <a:stretch xmlns:a="http://schemas.openxmlformats.org/drawingml/2006/main">
             <a:fillRect/>
           </a:stretch>
@@ -406,7 +406,7 @@
           <p:nvPr/>
         </p:nvPicPr>
         <p:blipFill>
-          <a:blip xmlns:r="http://schemas.openxmlformats.org/officeDocument/2006/relationships" xmlns:a="http://schemas.openxmlformats.org/drawingml/2006/main" r:embed="R6de4868162c248e3"/>
+          <a:blip xmlns:r="http://schemas.openxmlformats.org/officeDocument/2006/relationships" xmlns:a="http://schemas.openxmlformats.org/drawingml/2006/main" r:embed="R551b4eec7fed4b11"/>
           <a:stretch xmlns:a="http://schemas.openxmlformats.org/drawingml/2006/main">
             <a:fillRect/>
           </a:stretch>
@@ -445,7 +445,7 @@
           <p:nvPr/>
         </p:nvPicPr>
         <p:blipFill>
-          <a:blip xmlns:r="http://schemas.openxmlformats.org/officeDocument/2006/relationships" xmlns:a="http://schemas.openxmlformats.org/drawingml/2006/main" r:embed="R56c0d4cede96449d"/>
+          <a:blip xmlns:r="http://schemas.openxmlformats.org/officeDocument/2006/relationships" xmlns:a="http://schemas.openxmlformats.org/drawingml/2006/main" r:embed="Re29927f1989c4c32"/>
           <a:stretch xmlns:a="http://schemas.openxmlformats.org/drawingml/2006/main">
             <a:fillRect/>
           </a:stretch>
@@ -484,7 +484,7 @@
           <p:nvPr/>
         </p:nvPicPr>
         <p:blipFill>
-          <a:blip xmlns:r="http://schemas.openxmlformats.org/officeDocument/2006/relationships" xmlns:a="http://schemas.openxmlformats.org/drawingml/2006/main" r:embed="R5b1fc558d9164076"/>
+          <a:blip xmlns:r="http://schemas.openxmlformats.org/officeDocument/2006/relationships" xmlns:a="http://schemas.openxmlformats.org/drawingml/2006/main" r:embed="Rd1d88eb62421453f"/>
           <a:stretch xmlns:a="http://schemas.openxmlformats.org/drawingml/2006/main">
             <a:fillRect/>
           </a:stretch>
@@ -523,7 +523,7 @@
           <p:nvPr/>
         </p:nvPicPr>
         <p:blipFill>
-          <a:blip xmlns:r="http://schemas.openxmlformats.org/officeDocument/2006/relationships" xmlns:a="http://schemas.openxmlformats.org/drawingml/2006/main" r:embed="Rc4dc05b6395542fb"/>
+          <a:blip xmlns:r="http://schemas.openxmlformats.org/officeDocument/2006/relationships" xmlns:a="http://schemas.openxmlformats.org/drawingml/2006/main" r:embed="Rd4130d622c7d4967"/>
           <a:stretch xmlns:a="http://schemas.openxmlformats.org/drawingml/2006/main">
             <a:fillRect/>
           </a:stretch>
@@ -562,7 +562,7 @@
           <p:nvPr/>
         </p:nvPicPr>
         <p:blipFill>
-          <a:blip xmlns:r="http://schemas.openxmlformats.org/officeDocument/2006/relationships" xmlns:a="http://schemas.openxmlformats.org/drawingml/2006/main" r:embed="R351e05ac09e14b04"/>
+          <a:blip xmlns:r="http://schemas.openxmlformats.org/officeDocument/2006/relationships" xmlns:a="http://schemas.openxmlformats.org/drawingml/2006/main" r:embed="R3a7e8243763741ab"/>
           <a:stretch xmlns:a="http://schemas.openxmlformats.org/drawingml/2006/main">
             <a:fillRect/>
           </a:stretch>
@@ -601,7 +601,7 @@
           <p:nvPr/>
         </p:nvPicPr>
         <p:blipFill>
-          <a:blip xmlns:r="http://schemas.openxmlformats.org/officeDocument/2006/relationships" xmlns:a="http://schemas.openxmlformats.org/drawingml/2006/main" r:embed="Re7412dd07af2485e"/>
+          <a:blip xmlns:r="http://schemas.openxmlformats.org/officeDocument/2006/relationships" xmlns:a="http://schemas.openxmlformats.org/drawingml/2006/main" r:embed="R7604b2c23c874c29"/>
           <a:stretch xmlns:a="http://schemas.openxmlformats.org/drawingml/2006/main">
             <a:fillRect/>
           </a:stretch>
